--- a/public/videos/repositories/ranking-vote-hub/ranking-vote-hub-tech-preview.pptx
+++ b/public/videos/repositories/ranking-vote-hub/ranking-vote-hub-tech-preview.pptx
@@ -134,7 +134,7 @@
           <p:cNvPr id="2" name="タイトル 1">
             <a:extLst>
               <a:ext uri="{FF2B5EF4-FFF2-40B4-BE49-F238E27FC236}">
-                <a16:creationId xmlns:a16="http://schemas.microsoft.com/office/drawing/2014/main" id="{438DD9AB-096F-9689-BF9F-2C44EB5880AE}"/>
+                <a16:creationId xmlns:a16="http://schemas.microsoft.com/office/drawing/2014/main" id="{87051C7D-2F01-1382-0DBF-AF076A9D06CE}"/>
               </a:ext>
             </a:extLst>
           </p:cNvPr>
@@ -171,7 +171,7 @@
           <p:cNvPr id="3" name="字幕 2">
             <a:extLst>
               <a:ext uri="{FF2B5EF4-FFF2-40B4-BE49-F238E27FC236}">
-                <a16:creationId xmlns:a16="http://schemas.microsoft.com/office/drawing/2014/main" id="{2DA019AB-7F1C-1D59-F390-7163E63970F9}"/>
+                <a16:creationId xmlns:a16="http://schemas.microsoft.com/office/drawing/2014/main" id="{552E7AFB-C6B1-0298-B587-F8CE157B635C}"/>
               </a:ext>
             </a:extLst>
           </p:cNvPr>
@@ -241,7 +241,7 @@
           <p:cNvPr id="4" name="日付プレースホルダー 3">
             <a:extLst>
               <a:ext uri="{FF2B5EF4-FFF2-40B4-BE49-F238E27FC236}">
-                <a16:creationId xmlns:a16="http://schemas.microsoft.com/office/drawing/2014/main" id="{E91B0793-BDF4-058B-8398-A68806D4E871}"/>
+                <a16:creationId xmlns:a16="http://schemas.microsoft.com/office/drawing/2014/main" id="{DDA782D5-67FD-D7A9-706F-73815903973F}"/>
               </a:ext>
             </a:extLst>
           </p:cNvPr>
@@ -257,7 +257,7 @@
           <a:bodyPr/>
           <a:lstStyle/>
           <a:p>
-            <a:fld id="{BA6581C9-D067-4B56-B33F-6FAD14E4725A}" type="datetimeFigureOut">
+            <a:fld id="{DD205A3B-50EA-4C37-80B4-D1B842B0092D}" type="datetimeFigureOut">
               <a:rPr kumimoji="1" lang="ja-JP" altLang="en-US" smtClean="0"/>
               <a:t>2026/7/30</a:t>
             </a:fld>
@@ -270,7 +270,7 @@
           <p:cNvPr id="5" name="フッター プレースホルダー 4">
             <a:extLst>
               <a:ext uri="{FF2B5EF4-FFF2-40B4-BE49-F238E27FC236}">
-                <a16:creationId xmlns:a16="http://schemas.microsoft.com/office/drawing/2014/main" id="{FF028E8F-8A52-D147-7EFC-BFC5157F43F6}"/>
+                <a16:creationId xmlns:a16="http://schemas.microsoft.com/office/drawing/2014/main" id="{EDC7A45C-0765-1133-5D82-25D71240E6FF}"/>
               </a:ext>
             </a:extLst>
           </p:cNvPr>
@@ -295,7 +295,7 @@
           <p:cNvPr id="6" name="スライド番号プレースホルダー 5">
             <a:extLst>
               <a:ext uri="{FF2B5EF4-FFF2-40B4-BE49-F238E27FC236}">
-                <a16:creationId xmlns:a16="http://schemas.microsoft.com/office/drawing/2014/main" id="{807B185D-9406-B25F-B080-3202CDB39A4D}"/>
+                <a16:creationId xmlns:a16="http://schemas.microsoft.com/office/drawing/2014/main" id="{CC375BAC-A9CC-5F4B-79AD-1041A5903BA0}"/>
               </a:ext>
             </a:extLst>
           </p:cNvPr>
@@ -311,7 +311,7 @@
           <a:bodyPr/>
           <a:lstStyle/>
           <a:p>
-            <a:fld id="{0C317195-F16F-4F0F-8BB5-ADA0647B62BC}" type="slidenum">
+            <a:fld id="{6783D587-5AC6-4249-AFF1-42233633B41A}" type="slidenum">
               <a:rPr kumimoji="1" lang="ja-JP" altLang="en-US" smtClean="0"/>
               <a:t>‹#›</a:t>
             </a:fld>
@@ -322,7 +322,7 @@
     </p:spTree>
     <p:extLst>
       <p:ext uri="{BB962C8B-B14F-4D97-AF65-F5344CB8AC3E}">
-        <p14:creationId xmlns:p14="http://schemas.microsoft.com/office/powerpoint/2010/main" val="421418738"/>
+        <p14:creationId xmlns:p14="http://schemas.microsoft.com/office/powerpoint/2010/main" val="2769278589"/>
       </p:ext>
     </p:extLst>
   </p:cSld>
@@ -354,7 +354,7 @@
           <p:cNvPr id="2" name="タイトル 1">
             <a:extLst>
               <a:ext uri="{FF2B5EF4-FFF2-40B4-BE49-F238E27FC236}">
-                <a16:creationId xmlns:a16="http://schemas.microsoft.com/office/drawing/2014/main" id="{124981D5-2E6A-7284-7AE9-D11ADC2FAC0E}"/>
+                <a16:creationId xmlns:a16="http://schemas.microsoft.com/office/drawing/2014/main" id="{8B080AF4-B466-F75E-49C6-63B468301BAB}"/>
               </a:ext>
             </a:extLst>
           </p:cNvPr>
@@ -382,7 +382,7 @@
           <p:cNvPr id="3" name="縦書きテキスト プレースホルダー 2">
             <a:extLst>
               <a:ext uri="{FF2B5EF4-FFF2-40B4-BE49-F238E27FC236}">
-                <a16:creationId xmlns:a16="http://schemas.microsoft.com/office/drawing/2014/main" id="{50FBCD94-5E5C-30EC-F99F-B58C6A179D5F}"/>
+                <a16:creationId xmlns:a16="http://schemas.microsoft.com/office/drawing/2014/main" id="{D53378DE-E471-A919-26CD-B4E93C668B74}"/>
               </a:ext>
             </a:extLst>
           </p:cNvPr>
@@ -471,7 +471,7 @@
           <p:cNvPr id="4" name="日付プレースホルダー 3">
             <a:extLst>
               <a:ext uri="{FF2B5EF4-FFF2-40B4-BE49-F238E27FC236}">
-                <a16:creationId xmlns:a16="http://schemas.microsoft.com/office/drawing/2014/main" id="{587F033F-DCFF-0ACD-E24B-EE8F3F38A7AB}"/>
+                <a16:creationId xmlns:a16="http://schemas.microsoft.com/office/drawing/2014/main" id="{138ED30B-ED6B-F39E-7D8E-BBCE3429EB1C}"/>
               </a:ext>
             </a:extLst>
           </p:cNvPr>
@@ -487,7 +487,7 @@
           <a:bodyPr/>
           <a:lstStyle/>
           <a:p>
-            <a:fld id="{BA6581C9-D067-4B56-B33F-6FAD14E4725A}" type="datetimeFigureOut">
+            <a:fld id="{DD205A3B-50EA-4C37-80B4-D1B842B0092D}" type="datetimeFigureOut">
               <a:rPr kumimoji="1" lang="ja-JP" altLang="en-US" smtClean="0"/>
               <a:t>2026/7/30</a:t>
             </a:fld>
@@ -500,7 +500,7 @@
           <p:cNvPr id="5" name="フッター プレースホルダー 4">
             <a:extLst>
               <a:ext uri="{FF2B5EF4-FFF2-40B4-BE49-F238E27FC236}">
-                <a16:creationId xmlns:a16="http://schemas.microsoft.com/office/drawing/2014/main" id="{D56F72D1-49DF-1390-E018-0A2E60BFFC3C}"/>
+                <a16:creationId xmlns:a16="http://schemas.microsoft.com/office/drawing/2014/main" id="{D2A6B314-C950-D4E9-F2E3-EDC4ED0DEF80}"/>
               </a:ext>
             </a:extLst>
           </p:cNvPr>
@@ -525,7 +525,7 @@
           <p:cNvPr id="6" name="スライド番号プレースホルダー 5">
             <a:extLst>
               <a:ext uri="{FF2B5EF4-FFF2-40B4-BE49-F238E27FC236}">
-                <a16:creationId xmlns:a16="http://schemas.microsoft.com/office/drawing/2014/main" id="{4224A76F-EDB4-B5EC-CD03-0DC1C554E15F}"/>
+                <a16:creationId xmlns:a16="http://schemas.microsoft.com/office/drawing/2014/main" id="{3CF1F523-96B5-4306-A1E3-0DF08CDA80D6}"/>
               </a:ext>
             </a:extLst>
           </p:cNvPr>
@@ -541,7 +541,7 @@
           <a:bodyPr/>
           <a:lstStyle/>
           <a:p>
-            <a:fld id="{0C317195-F16F-4F0F-8BB5-ADA0647B62BC}" type="slidenum">
+            <a:fld id="{6783D587-5AC6-4249-AFF1-42233633B41A}" type="slidenum">
               <a:rPr kumimoji="1" lang="ja-JP" altLang="en-US" smtClean="0"/>
               <a:t>‹#›</a:t>
             </a:fld>
@@ -552,7 +552,7 @@
     </p:spTree>
     <p:extLst>
       <p:ext uri="{BB962C8B-B14F-4D97-AF65-F5344CB8AC3E}">
-        <p14:creationId xmlns:p14="http://schemas.microsoft.com/office/powerpoint/2010/main" val="1508645340"/>
+        <p14:creationId xmlns:p14="http://schemas.microsoft.com/office/powerpoint/2010/main" val="229622119"/>
       </p:ext>
     </p:extLst>
   </p:cSld>
@@ -584,7 +584,7 @@
           <p:cNvPr id="2" name="縦書きタイトル 1">
             <a:extLst>
               <a:ext uri="{FF2B5EF4-FFF2-40B4-BE49-F238E27FC236}">
-                <a16:creationId xmlns:a16="http://schemas.microsoft.com/office/drawing/2014/main" id="{536EC93E-96F6-B28F-02A0-34A33A2AEAE6}"/>
+                <a16:creationId xmlns:a16="http://schemas.microsoft.com/office/drawing/2014/main" id="{DDEA8AF5-83B5-ACB0-8032-1203E8F1E129}"/>
               </a:ext>
             </a:extLst>
           </p:cNvPr>
@@ -617,7 +617,7 @@
           <p:cNvPr id="3" name="縦書きテキスト プレースホルダー 2">
             <a:extLst>
               <a:ext uri="{FF2B5EF4-FFF2-40B4-BE49-F238E27FC236}">
-                <a16:creationId xmlns:a16="http://schemas.microsoft.com/office/drawing/2014/main" id="{75E38571-FC83-AC52-A15B-A846807DCA7B}"/>
+                <a16:creationId xmlns:a16="http://schemas.microsoft.com/office/drawing/2014/main" id="{861B418F-5067-9C9C-04DB-B48D8C51DF1F}"/>
               </a:ext>
             </a:extLst>
           </p:cNvPr>
@@ -711,7 +711,7 @@
           <p:cNvPr id="4" name="日付プレースホルダー 3">
             <a:extLst>
               <a:ext uri="{FF2B5EF4-FFF2-40B4-BE49-F238E27FC236}">
-                <a16:creationId xmlns:a16="http://schemas.microsoft.com/office/drawing/2014/main" id="{34FC95D0-1F79-652D-2ACD-C299B26D6149}"/>
+                <a16:creationId xmlns:a16="http://schemas.microsoft.com/office/drawing/2014/main" id="{45C1C2EB-5D3C-FF11-2379-9D1CBC8A7374}"/>
               </a:ext>
             </a:extLst>
           </p:cNvPr>
@@ -727,7 +727,7 @@
           <a:bodyPr/>
           <a:lstStyle/>
           <a:p>
-            <a:fld id="{BA6581C9-D067-4B56-B33F-6FAD14E4725A}" type="datetimeFigureOut">
+            <a:fld id="{DD205A3B-50EA-4C37-80B4-D1B842B0092D}" type="datetimeFigureOut">
               <a:rPr kumimoji="1" lang="ja-JP" altLang="en-US" smtClean="0"/>
               <a:t>2026/7/30</a:t>
             </a:fld>
@@ -740,7 +740,7 @@
           <p:cNvPr id="5" name="フッター プレースホルダー 4">
             <a:extLst>
               <a:ext uri="{FF2B5EF4-FFF2-40B4-BE49-F238E27FC236}">
-                <a16:creationId xmlns:a16="http://schemas.microsoft.com/office/drawing/2014/main" id="{C3BBCE71-398B-5FCC-E614-CB8AD50C9EC4}"/>
+                <a16:creationId xmlns:a16="http://schemas.microsoft.com/office/drawing/2014/main" id="{4FA7AF4E-820C-95D0-3FB7-1992FC9F5E40}"/>
               </a:ext>
             </a:extLst>
           </p:cNvPr>
@@ -765,7 +765,7 @@
           <p:cNvPr id="6" name="スライド番号プレースホルダー 5">
             <a:extLst>
               <a:ext uri="{FF2B5EF4-FFF2-40B4-BE49-F238E27FC236}">
-                <a16:creationId xmlns:a16="http://schemas.microsoft.com/office/drawing/2014/main" id="{D5558109-5FFF-29CA-1DDF-7AD029CBB7D0}"/>
+                <a16:creationId xmlns:a16="http://schemas.microsoft.com/office/drawing/2014/main" id="{7B73812D-6DD7-8CB5-9EFB-96CB004B5EF2}"/>
               </a:ext>
             </a:extLst>
           </p:cNvPr>
@@ -781,7 +781,7 @@
           <a:bodyPr/>
           <a:lstStyle/>
           <a:p>
-            <a:fld id="{0C317195-F16F-4F0F-8BB5-ADA0647B62BC}" type="slidenum">
+            <a:fld id="{6783D587-5AC6-4249-AFF1-42233633B41A}" type="slidenum">
               <a:rPr kumimoji="1" lang="ja-JP" altLang="en-US" smtClean="0"/>
               <a:t>‹#›</a:t>
             </a:fld>
@@ -792,7 +792,7 @@
     </p:spTree>
     <p:extLst>
       <p:ext uri="{BB962C8B-B14F-4D97-AF65-F5344CB8AC3E}">
-        <p14:creationId xmlns:p14="http://schemas.microsoft.com/office/powerpoint/2010/main" val="2805563701"/>
+        <p14:creationId xmlns:p14="http://schemas.microsoft.com/office/powerpoint/2010/main" val="3428135574"/>
       </p:ext>
     </p:extLst>
   </p:cSld>
@@ -824,7 +824,7 @@
           <p:cNvPr id="2" name="タイトル 1">
             <a:extLst>
               <a:ext uri="{FF2B5EF4-FFF2-40B4-BE49-F238E27FC236}">
-                <a16:creationId xmlns:a16="http://schemas.microsoft.com/office/drawing/2014/main" id="{35D31B4F-4F03-FEED-E72A-A3CE59255391}"/>
+                <a16:creationId xmlns:a16="http://schemas.microsoft.com/office/drawing/2014/main" id="{2A2EEB71-B317-551D-EAAE-9C853F7C407D}"/>
               </a:ext>
             </a:extLst>
           </p:cNvPr>
@@ -852,7 +852,7 @@
           <p:cNvPr id="3" name="コンテンツ プレースホルダー 2">
             <a:extLst>
               <a:ext uri="{FF2B5EF4-FFF2-40B4-BE49-F238E27FC236}">
-                <a16:creationId xmlns:a16="http://schemas.microsoft.com/office/drawing/2014/main" id="{5F67F3F7-4B76-B4CA-BD05-C03A6398FBD8}"/>
+                <a16:creationId xmlns:a16="http://schemas.microsoft.com/office/drawing/2014/main" id="{2C08D807-0F79-9364-9CBF-7FB1A7DE841A}"/>
               </a:ext>
             </a:extLst>
           </p:cNvPr>
@@ -941,7 +941,7 @@
           <p:cNvPr id="4" name="日付プレースホルダー 3">
             <a:extLst>
               <a:ext uri="{FF2B5EF4-FFF2-40B4-BE49-F238E27FC236}">
-                <a16:creationId xmlns:a16="http://schemas.microsoft.com/office/drawing/2014/main" id="{B8FD639E-24E0-E87C-1169-165C5E273B54}"/>
+                <a16:creationId xmlns:a16="http://schemas.microsoft.com/office/drawing/2014/main" id="{89096CB2-77A0-17CA-57D3-CBB2C27DBCAB}"/>
               </a:ext>
             </a:extLst>
           </p:cNvPr>
@@ -957,7 +957,7 @@
           <a:bodyPr/>
           <a:lstStyle/>
           <a:p>
-            <a:fld id="{BA6581C9-D067-4B56-B33F-6FAD14E4725A}" type="datetimeFigureOut">
+            <a:fld id="{DD205A3B-50EA-4C37-80B4-D1B842B0092D}" type="datetimeFigureOut">
               <a:rPr kumimoji="1" lang="ja-JP" altLang="en-US" smtClean="0"/>
               <a:t>2026/7/30</a:t>
             </a:fld>
@@ -970,7 +970,7 @@
           <p:cNvPr id="5" name="フッター プレースホルダー 4">
             <a:extLst>
               <a:ext uri="{FF2B5EF4-FFF2-40B4-BE49-F238E27FC236}">
-                <a16:creationId xmlns:a16="http://schemas.microsoft.com/office/drawing/2014/main" id="{620F9EA4-0A04-2771-A182-559CA52C0EA0}"/>
+                <a16:creationId xmlns:a16="http://schemas.microsoft.com/office/drawing/2014/main" id="{0CB501AF-CA99-0F3E-8ABF-8435356AD519}"/>
               </a:ext>
             </a:extLst>
           </p:cNvPr>
@@ -995,7 +995,7 @@
           <p:cNvPr id="6" name="スライド番号プレースホルダー 5">
             <a:extLst>
               <a:ext uri="{FF2B5EF4-FFF2-40B4-BE49-F238E27FC236}">
-                <a16:creationId xmlns:a16="http://schemas.microsoft.com/office/drawing/2014/main" id="{596AD976-8CF7-A806-7560-B8EADD972A0F}"/>
+                <a16:creationId xmlns:a16="http://schemas.microsoft.com/office/drawing/2014/main" id="{AC87C5B3-D6F1-840D-257E-4F81A17305D4}"/>
               </a:ext>
             </a:extLst>
           </p:cNvPr>
@@ -1011,7 +1011,7 @@
           <a:bodyPr/>
           <a:lstStyle/>
           <a:p>
-            <a:fld id="{0C317195-F16F-4F0F-8BB5-ADA0647B62BC}" type="slidenum">
+            <a:fld id="{6783D587-5AC6-4249-AFF1-42233633B41A}" type="slidenum">
               <a:rPr kumimoji="1" lang="ja-JP" altLang="en-US" smtClean="0"/>
               <a:t>‹#›</a:t>
             </a:fld>
@@ -1022,7 +1022,7 @@
     </p:spTree>
     <p:extLst>
       <p:ext uri="{BB962C8B-B14F-4D97-AF65-F5344CB8AC3E}">
-        <p14:creationId xmlns:p14="http://schemas.microsoft.com/office/powerpoint/2010/main" val="443161239"/>
+        <p14:creationId xmlns:p14="http://schemas.microsoft.com/office/powerpoint/2010/main" val="1276091090"/>
       </p:ext>
     </p:extLst>
   </p:cSld>
@@ -1054,7 +1054,7 @@
           <p:cNvPr id="2" name="タイトル 1">
             <a:extLst>
               <a:ext uri="{FF2B5EF4-FFF2-40B4-BE49-F238E27FC236}">
-                <a16:creationId xmlns:a16="http://schemas.microsoft.com/office/drawing/2014/main" id="{40E5109F-A7D1-34C5-34BF-A8D3AD2DE208}"/>
+                <a16:creationId xmlns:a16="http://schemas.microsoft.com/office/drawing/2014/main" id="{BE79DA71-47F1-A3AC-FDFA-D65EF1365649}"/>
               </a:ext>
             </a:extLst>
           </p:cNvPr>
@@ -1091,7 +1091,7 @@
           <p:cNvPr id="3" name="テキスト プレースホルダー 2">
             <a:extLst>
               <a:ext uri="{FF2B5EF4-FFF2-40B4-BE49-F238E27FC236}">
-                <a16:creationId xmlns:a16="http://schemas.microsoft.com/office/drawing/2014/main" id="{E2B167FB-1CE6-F10A-9CE4-DD92C6076997}"/>
+                <a16:creationId xmlns:a16="http://schemas.microsoft.com/office/drawing/2014/main" id="{3094C820-1A83-38D1-E2AE-7C33FC11782E}"/>
               </a:ext>
             </a:extLst>
           </p:cNvPr>
@@ -1216,7 +1216,7 @@
           <p:cNvPr id="4" name="日付プレースホルダー 3">
             <a:extLst>
               <a:ext uri="{FF2B5EF4-FFF2-40B4-BE49-F238E27FC236}">
-                <a16:creationId xmlns:a16="http://schemas.microsoft.com/office/drawing/2014/main" id="{FEF102CE-9F29-DFA9-42A2-04008FECF299}"/>
+                <a16:creationId xmlns:a16="http://schemas.microsoft.com/office/drawing/2014/main" id="{E717C87C-6CD7-4DAD-BB93-CEAA836BB1C0}"/>
               </a:ext>
             </a:extLst>
           </p:cNvPr>
@@ -1232,7 +1232,7 @@
           <a:bodyPr/>
           <a:lstStyle/>
           <a:p>
-            <a:fld id="{BA6581C9-D067-4B56-B33F-6FAD14E4725A}" type="datetimeFigureOut">
+            <a:fld id="{DD205A3B-50EA-4C37-80B4-D1B842B0092D}" type="datetimeFigureOut">
               <a:rPr kumimoji="1" lang="ja-JP" altLang="en-US" smtClean="0"/>
               <a:t>2026/7/30</a:t>
             </a:fld>
@@ -1245,7 +1245,7 @@
           <p:cNvPr id="5" name="フッター プレースホルダー 4">
             <a:extLst>
               <a:ext uri="{FF2B5EF4-FFF2-40B4-BE49-F238E27FC236}">
-                <a16:creationId xmlns:a16="http://schemas.microsoft.com/office/drawing/2014/main" id="{D883D342-0BE4-193C-6664-05D116FAE652}"/>
+                <a16:creationId xmlns:a16="http://schemas.microsoft.com/office/drawing/2014/main" id="{19D07CD1-D577-348D-B2BD-5BE3644A1F74}"/>
               </a:ext>
             </a:extLst>
           </p:cNvPr>
@@ -1270,7 +1270,7 @@
           <p:cNvPr id="6" name="スライド番号プレースホルダー 5">
             <a:extLst>
               <a:ext uri="{FF2B5EF4-FFF2-40B4-BE49-F238E27FC236}">
-                <a16:creationId xmlns:a16="http://schemas.microsoft.com/office/drawing/2014/main" id="{98D9E6A9-C574-6D06-255C-E510D322CFEE}"/>
+                <a16:creationId xmlns:a16="http://schemas.microsoft.com/office/drawing/2014/main" id="{4D1DF112-5CF7-39EE-EFD1-2F20B8AD2ECC}"/>
               </a:ext>
             </a:extLst>
           </p:cNvPr>
@@ -1286,7 +1286,7 @@
           <a:bodyPr/>
           <a:lstStyle/>
           <a:p>
-            <a:fld id="{0C317195-F16F-4F0F-8BB5-ADA0647B62BC}" type="slidenum">
+            <a:fld id="{6783D587-5AC6-4249-AFF1-42233633B41A}" type="slidenum">
               <a:rPr kumimoji="1" lang="ja-JP" altLang="en-US" smtClean="0"/>
               <a:t>‹#›</a:t>
             </a:fld>
@@ -1297,7 +1297,7 @@
     </p:spTree>
     <p:extLst>
       <p:ext uri="{BB962C8B-B14F-4D97-AF65-F5344CB8AC3E}">
-        <p14:creationId xmlns:p14="http://schemas.microsoft.com/office/powerpoint/2010/main" val="3988979004"/>
+        <p14:creationId xmlns:p14="http://schemas.microsoft.com/office/powerpoint/2010/main" val="2745945773"/>
       </p:ext>
     </p:extLst>
   </p:cSld>
@@ -1329,7 +1329,7 @@
           <p:cNvPr id="2" name="タイトル 1">
             <a:extLst>
               <a:ext uri="{FF2B5EF4-FFF2-40B4-BE49-F238E27FC236}">
-                <a16:creationId xmlns:a16="http://schemas.microsoft.com/office/drawing/2014/main" id="{CB535173-C285-3F2E-A025-13ECE419669A}"/>
+                <a16:creationId xmlns:a16="http://schemas.microsoft.com/office/drawing/2014/main" id="{B5493459-9026-A075-97AA-43F687429AE9}"/>
               </a:ext>
             </a:extLst>
           </p:cNvPr>
@@ -1357,7 +1357,7 @@
           <p:cNvPr id="3" name="コンテンツ プレースホルダー 2">
             <a:extLst>
               <a:ext uri="{FF2B5EF4-FFF2-40B4-BE49-F238E27FC236}">
-                <a16:creationId xmlns:a16="http://schemas.microsoft.com/office/drawing/2014/main" id="{30E86192-7D88-242D-F110-0E49A20ADABC}"/>
+                <a16:creationId xmlns:a16="http://schemas.microsoft.com/office/drawing/2014/main" id="{DE299EE3-52FB-F63C-9481-5C328B91F942}"/>
               </a:ext>
             </a:extLst>
           </p:cNvPr>
@@ -1451,7 +1451,7 @@
           <p:cNvPr id="4" name="コンテンツ プレースホルダー 3">
             <a:extLst>
               <a:ext uri="{FF2B5EF4-FFF2-40B4-BE49-F238E27FC236}">
-                <a16:creationId xmlns:a16="http://schemas.microsoft.com/office/drawing/2014/main" id="{91CC5EBA-F960-AFAA-B25B-3A79DFA54A4B}"/>
+                <a16:creationId xmlns:a16="http://schemas.microsoft.com/office/drawing/2014/main" id="{333A0DF5-D69C-7A3C-87C2-E8E6B2198E8B}"/>
               </a:ext>
             </a:extLst>
           </p:cNvPr>
@@ -1545,7 +1545,7 @@
           <p:cNvPr id="5" name="日付プレースホルダー 4">
             <a:extLst>
               <a:ext uri="{FF2B5EF4-FFF2-40B4-BE49-F238E27FC236}">
-                <a16:creationId xmlns:a16="http://schemas.microsoft.com/office/drawing/2014/main" id="{92A61BB2-E05F-C9B4-D024-AA8760D54382}"/>
+                <a16:creationId xmlns:a16="http://schemas.microsoft.com/office/drawing/2014/main" id="{7D3823E2-2A4F-2FC3-5DF9-A2AD1F45071F}"/>
               </a:ext>
             </a:extLst>
           </p:cNvPr>
@@ -1561,7 +1561,7 @@
           <a:bodyPr/>
           <a:lstStyle/>
           <a:p>
-            <a:fld id="{BA6581C9-D067-4B56-B33F-6FAD14E4725A}" type="datetimeFigureOut">
+            <a:fld id="{DD205A3B-50EA-4C37-80B4-D1B842B0092D}" type="datetimeFigureOut">
               <a:rPr kumimoji="1" lang="ja-JP" altLang="en-US" smtClean="0"/>
               <a:t>2026/7/30</a:t>
             </a:fld>
@@ -1574,7 +1574,7 @@
           <p:cNvPr id="6" name="フッター プレースホルダー 5">
             <a:extLst>
               <a:ext uri="{FF2B5EF4-FFF2-40B4-BE49-F238E27FC236}">
-                <a16:creationId xmlns:a16="http://schemas.microsoft.com/office/drawing/2014/main" id="{79B13D67-EEA7-27FF-7B38-10E97C687135}"/>
+                <a16:creationId xmlns:a16="http://schemas.microsoft.com/office/drawing/2014/main" id="{317D00E7-140D-43AA-8F25-FEEBDAA393A0}"/>
               </a:ext>
             </a:extLst>
           </p:cNvPr>
@@ -1599,7 +1599,7 @@
           <p:cNvPr id="7" name="スライド番号プレースホルダー 6">
             <a:extLst>
               <a:ext uri="{FF2B5EF4-FFF2-40B4-BE49-F238E27FC236}">
-                <a16:creationId xmlns:a16="http://schemas.microsoft.com/office/drawing/2014/main" id="{E200CF02-5369-544D-26DE-191454DFE65B}"/>
+                <a16:creationId xmlns:a16="http://schemas.microsoft.com/office/drawing/2014/main" id="{C4A81165-504C-E0C9-A9BB-0C73BD81DACD}"/>
               </a:ext>
             </a:extLst>
           </p:cNvPr>
@@ -1615,7 +1615,7 @@
           <a:bodyPr/>
           <a:lstStyle/>
           <a:p>
-            <a:fld id="{0C317195-F16F-4F0F-8BB5-ADA0647B62BC}" type="slidenum">
+            <a:fld id="{6783D587-5AC6-4249-AFF1-42233633B41A}" type="slidenum">
               <a:rPr kumimoji="1" lang="ja-JP" altLang="en-US" smtClean="0"/>
               <a:t>‹#›</a:t>
             </a:fld>
@@ -1626,7 +1626,7 @@
     </p:spTree>
     <p:extLst>
       <p:ext uri="{BB962C8B-B14F-4D97-AF65-F5344CB8AC3E}">
-        <p14:creationId xmlns:p14="http://schemas.microsoft.com/office/powerpoint/2010/main" val="1413149351"/>
+        <p14:creationId xmlns:p14="http://schemas.microsoft.com/office/powerpoint/2010/main" val="1122051750"/>
       </p:ext>
     </p:extLst>
   </p:cSld>
@@ -1658,7 +1658,7 @@
           <p:cNvPr id="2" name="タイトル 1">
             <a:extLst>
               <a:ext uri="{FF2B5EF4-FFF2-40B4-BE49-F238E27FC236}">
-                <a16:creationId xmlns:a16="http://schemas.microsoft.com/office/drawing/2014/main" id="{15131F92-A66B-322C-EB39-46B5B49B48EF}"/>
+                <a16:creationId xmlns:a16="http://schemas.microsoft.com/office/drawing/2014/main" id="{5A3A559A-BEF1-31DF-0FC2-2F8A529D830A}"/>
               </a:ext>
             </a:extLst>
           </p:cNvPr>
@@ -1691,7 +1691,7 @@
           <p:cNvPr id="3" name="テキスト プレースホルダー 2">
             <a:extLst>
               <a:ext uri="{FF2B5EF4-FFF2-40B4-BE49-F238E27FC236}">
-                <a16:creationId xmlns:a16="http://schemas.microsoft.com/office/drawing/2014/main" id="{C6FB838E-6C4C-D85E-EDFA-D3404D0661B0}"/>
+                <a16:creationId xmlns:a16="http://schemas.microsoft.com/office/drawing/2014/main" id="{F57B207D-12A9-45AF-A4EA-7DC2DA525906}"/>
               </a:ext>
             </a:extLst>
           </p:cNvPr>
@@ -1762,7 +1762,7 @@
           <p:cNvPr id="4" name="コンテンツ プレースホルダー 3">
             <a:extLst>
               <a:ext uri="{FF2B5EF4-FFF2-40B4-BE49-F238E27FC236}">
-                <a16:creationId xmlns:a16="http://schemas.microsoft.com/office/drawing/2014/main" id="{3D5B1701-CA2E-9AB5-52AC-0F294708BF15}"/>
+                <a16:creationId xmlns:a16="http://schemas.microsoft.com/office/drawing/2014/main" id="{346659A3-F428-ED29-9A09-7EE422E110E5}"/>
               </a:ext>
             </a:extLst>
           </p:cNvPr>
@@ -1856,7 +1856,7 @@
           <p:cNvPr id="5" name="テキスト プレースホルダー 4">
             <a:extLst>
               <a:ext uri="{FF2B5EF4-FFF2-40B4-BE49-F238E27FC236}">
-                <a16:creationId xmlns:a16="http://schemas.microsoft.com/office/drawing/2014/main" id="{905EE30B-99FD-76BE-46C6-4614D6C42FDF}"/>
+                <a16:creationId xmlns:a16="http://schemas.microsoft.com/office/drawing/2014/main" id="{15AB0FB4-7B84-1752-5FCB-D1F795E925DD}"/>
               </a:ext>
             </a:extLst>
           </p:cNvPr>
@@ -1927,7 +1927,7 @@
           <p:cNvPr id="6" name="コンテンツ プレースホルダー 5">
             <a:extLst>
               <a:ext uri="{FF2B5EF4-FFF2-40B4-BE49-F238E27FC236}">
-                <a16:creationId xmlns:a16="http://schemas.microsoft.com/office/drawing/2014/main" id="{05B662DE-5FD0-0283-8B1F-E6E021FEEE23}"/>
+                <a16:creationId xmlns:a16="http://schemas.microsoft.com/office/drawing/2014/main" id="{37DEBC3B-1A13-BF7C-4545-3DA6235BAA43}"/>
               </a:ext>
             </a:extLst>
           </p:cNvPr>
@@ -2021,7 +2021,7 @@
           <p:cNvPr id="7" name="日付プレースホルダー 6">
             <a:extLst>
               <a:ext uri="{FF2B5EF4-FFF2-40B4-BE49-F238E27FC236}">
-                <a16:creationId xmlns:a16="http://schemas.microsoft.com/office/drawing/2014/main" id="{C00884AC-3B2F-1001-4A75-07540A4E7B76}"/>
+                <a16:creationId xmlns:a16="http://schemas.microsoft.com/office/drawing/2014/main" id="{B8EA2571-2E10-8500-19BC-B27FEEFFC1C2}"/>
               </a:ext>
             </a:extLst>
           </p:cNvPr>
@@ -2037,7 +2037,7 @@
           <a:bodyPr/>
           <a:lstStyle/>
           <a:p>
-            <a:fld id="{BA6581C9-D067-4B56-B33F-6FAD14E4725A}" type="datetimeFigureOut">
+            <a:fld id="{DD205A3B-50EA-4C37-80B4-D1B842B0092D}" type="datetimeFigureOut">
               <a:rPr kumimoji="1" lang="ja-JP" altLang="en-US" smtClean="0"/>
               <a:t>2026/7/30</a:t>
             </a:fld>
@@ -2050,7 +2050,7 @@
           <p:cNvPr id="8" name="フッター プレースホルダー 7">
             <a:extLst>
               <a:ext uri="{FF2B5EF4-FFF2-40B4-BE49-F238E27FC236}">
-                <a16:creationId xmlns:a16="http://schemas.microsoft.com/office/drawing/2014/main" id="{B56FACD4-C0E7-3AA6-B6BC-3A3847502D52}"/>
+                <a16:creationId xmlns:a16="http://schemas.microsoft.com/office/drawing/2014/main" id="{E139DA01-5DA3-B413-9A84-E33FE7632E86}"/>
               </a:ext>
             </a:extLst>
           </p:cNvPr>
@@ -2075,7 +2075,7 @@
           <p:cNvPr id="9" name="スライド番号プレースホルダー 8">
             <a:extLst>
               <a:ext uri="{FF2B5EF4-FFF2-40B4-BE49-F238E27FC236}">
-                <a16:creationId xmlns:a16="http://schemas.microsoft.com/office/drawing/2014/main" id="{E817D902-DE15-A2E3-50E9-9574A5750647}"/>
+                <a16:creationId xmlns:a16="http://schemas.microsoft.com/office/drawing/2014/main" id="{9FBF297C-8A9D-3398-3749-7F2351C503D9}"/>
               </a:ext>
             </a:extLst>
           </p:cNvPr>
@@ -2091,7 +2091,7 @@
           <a:bodyPr/>
           <a:lstStyle/>
           <a:p>
-            <a:fld id="{0C317195-F16F-4F0F-8BB5-ADA0647B62BC}" type="slidenum">
+            <a:fld id="{6783D587-5AC6-4249-AFF1-42233633B41A}" type="slidenum">
               <a:rPr kumimoji="1" lang="ja-JP" altLang="en-US" smtClean="0"/>
               <a:t>‹#›</a:t>
             </a:fld>
@@ -2102,7 +2102,7 @@
     </p:spTree>
     <p:extLst>
       <p:ext uri="{BB962C8B-B14F-4D97-AF65-F5344CB8AC3E}">
-        <p14:creationId xmlns:p14="http://schemas.microsoft.com/office/powerpoint/2010/main" val="261217689"/>
+        <p14:creationId xmlns:p14="http://schemas.microsoft.com/office/powerpoint/2010/main" val="1496945542"/>
       </p:ext>
     </p:extLst>
   </p:cSld>
@@ -2134,7 +2134,7 @@
           <p:cNvPr id="2" name="タイトル 1">
             <a:extLst>
               <a:ext uri="{FF2B5EF4-FFF2-40B4-BE49-F238E27FC236}">
-                <a16:creationId xmlns:a16="http://schemas.microsoft.com/office/drawing/2014/main" id="{A1F5CA1A-3EB2-5E88-3063-281085516A91}"/>
+                <a16:creationId xmlns:a16="http://schemas.microsoft.com/office/drawing/2014/main" id="{04D266D8-956A-F39C-DBFE-231ACB241854}"/>
               </a:ext>
             </a:extLst>
           </p:cNvPr>
@@ -2162,7 +2162,7 @@
           <p:cNvPr id="3" name="日付プレースホルダー 2">
             <a:extLst>
               <a:ext uri="{FF2B5EF4-FFF2-40B4-BE49-F238E27FC236}">
-                <a16:creationId xmlns:a16="http://schemas.microsoft.com/office/drawing/2014/main" id="{393FBF3D-C425-BB11-B158-ACCA9D76AF65}"/>
+                <a16:creationId xmlns:a16="http://schemas.microsoft.com/office/drawing/2014/main" id="{086637B5-CD6A-334A-0964-F3F0B361EE55}"/>
               </a:ext>
             </a:extLst>
           </p:cNvPr>
@@ -2178,7 +2178,7 @@
           <a:bodyPr/>
           <a:lstStyle/>
           <a:p>
-            <a:fld id="{BA6581C9-D067-4B56-B33F-6FAD14E4725A}" type="datetimeFigureOut">
+            <a:fld id="{DD205A3B-50EA-4C37-80B4-D1B842B0092D}" type="datetimeFigureOut">
               <a:rPr kumimoji="1" lang="ja-JP" altLang="en-US" smtClean="0"/>
               <a:t>2026/7/30</a:t>
             </a:fld>
@@ -2191,7 +2191,7 @@
           <p:cNvPr id="4" name="フッター プレースホルダー 3">
             <a:extLst>
               <a:ext uri="{FF2B5EF4-FFF2-40B4-BE49-F238E27FC236}">
-                <a16:creationId xmlns:a16="http://schemas.microsoft.com/office/drawing/2014/main" id="{52B12660-40CF-FAB1-42CE-652A0E92CD80}"/>
+                <a16:creationId xmlns:a16="http://schemas.microsoft.com/office/drawing/2014/main" id="{6887BC6D-1BDB-A0F8-EA73-F695DD87A661}"/>
               </a:ext>
             </a:extLst>
           </p:cNvPr>
@@ -2216,7 +2216,7 @@
           <p:cNvPr id="5" name="スライド番号プレースホルダー 4">
             <a:extLst>
               <a:ext uri="{FF2B5EF4-FFF2-40B4-BE49-F238E27FC236}">
-                <a16:creationId xmlns:a16="http://schemas.microsoft.com/office/drawing/2014/main" id="{86406777-60B6-4A81-0F58-23DDD147F9B5}"/>
+                <a16:creationId xmlns:a16="http://schemas.microsoft.com/office/drawing/2014/main" id="{29785BE5-606B-E301-B413-177F5C519A9D}"/>
               </a:ext>
             </a:extLst>
           </p:cNvPr>
@@ -2232,7 +2232,7 @@
           <a:bodyPr/>
           <a:lstStyle/>
           <a:p>
-            <a:fld id="{0C317195-F16F-4F0F-8BB5-ADA0647B62BC}" type="slidenum">
+            <a:fld id="{6783D587-5AC6-4249-AFF1-42233633B41A}" type="slidenum">
               <a:rPr kumimoji="1" lang="ja-JP" altLang="en-US" smtClean="0"/>
               <a:t>‹#›</a:t>
             </a:fld>
@@ -2243,7 +2243,7 @@
     </p:spTree>
     <p:extLst>
       <p:ext uri="{BB962C8B-B14F-4D97-AF65-F5344CB8AC3E}">
-        <p14:creationId xmlns:p14="http://schemas.microsoft.com/office/powerpoint/2010/main" val="4099355485"/>
+        <p14:creationId xmlns:p14="http://schemas.microsoft.com/office/powerpoint/2010/main" val="3725298563"/>
       </p:ext>
     </p:extLst>
   </p:cSld>
@@ -2275,7 +2275,7 @@
           <p:cNvPr id="2" name="日付プレースホルダー 1">
             <a:extLst>
               <a:ext uri="{FF2B5EF4-FFF2-40B4-BE49-F238E27FC236}">
-                <a16:creationId xmlns:a16="http://schemas.microsoft.com/office/drawing/2014/main" id="{8E670A0B-2D6F-078C-7EB6-9382E4B5C40E}"/>
+                <a16:creationId xmlns:a16="http://schemas.microsoft.com/office/drawing/2014/main" id="{4BDA2696-EB7C-8238-4220-403028F4A313}"/>
               </a:ext>
             </a:extLst>
           </p:cNvPr>
@@ -2291,7 +2291,7 @@
           <a:bodyPr/>
           <a:lstStyle/>
           <a:p>
-            <a:fld id="{BA6581C9-D067-4B56-B33F-6FAD14E4725A}" type="datetimeFigureOut">
+            <a:fld id="{DD205A3B-50EA-4C37-80B4-D1B842B0092D}" type="datetimeFigureOut">
               <a:rPr kumimoji="1" lang="ja-JP" altLang="en-US" smtClean="0"/>
               <a:t>2026/7/30</a:t>
             </a:fld>
@@ -2304,7 +2304,7 @@
           <p:cNvPr id="3" name="フッター プレースホルダー 2">
             <a:extLst>
               <a:ext uri="{FF2B5EF4-FFF2-40B4-BE49-F238E27FC236}">
-                <a16:creationId xmlns:a16="http://schemas.microsoft.com/office/drawing/2014/main" id="{9C266315-C05F-41BC-D719-5D39F280900B}"/>
+                <a16:creationId xmlns:a16="http://schemas.microsoft.com/office/drawing/2014/main" id="{B7FF8AD9-748C-4825-7183-BCD73A42CD23}"/>
               </a:ext>
             </a:extLst>
           </p:cNvPr>
@@ -2329,7 +2329,7 @@
           <p:cNvPr id="4" name="スライド番号プレースホルダー 3">
             <a:extLst>
               <a:ext uri="{FF2B5EF4-FFF2-40B4-BE49-F238E27FC236}">
-                <a16:creationId xmlns:a16="http://schemas.microsoft.com/office/drawing/2014/main" id="{74FB48A7-4F3B-DCCC-C7A1-751B8400A07A}"/>
+                <a16:creationId xmlns:a16="http://schemas.microsoft.com/office/drawing/2014/main" id="{16C0BAE3-B512-06EE-6E20-135B3DAC5688}"/>
               </a:ext>
             </a:extLst>
           </p:cNvPr>
@@ -2345,7 +2345,7 @@
           <a:bodyPr/>
           <a:lstStyle/>
           <a:p>
-            <a:fld id="{0C317195-F16F-4F0F-8BB5-ADA0647B62BC}" type="slidenum">
+            <a:fld id="{6783D587-5AC6-4249-AFF1-42233633B41A}" type="slidenum">
               <a:rPr kumimoji="1" lang="ja-JP" altLang="en-US" smtClean="0"/>
               <a:t>‹#›</a:t>
             </a:fld>
@@ -2356,7 +2356,7 @@
     </p:spTree>
     <p:extLst>
       <p:ext uri="{BB962C8B-B14F-4D97-AF65-F5344CB8AC3E}">
-        <p14:creationId xmlns:p14="http://schemas.microsoft.com/office/powerpoint/2010/main" val="1453600606"/>
+        <p14:creationId xmlns:p14="http://schemas.microsoft.com/office/powerpoint/2010/main" val="3056030859"/>
       </p:ext>
     </p:extLst>
   </p:cSld>
@@ -2388,7 +2388,7 @@
           <p:cNvPr id="2" name="タイトル 1">
             <a:extLst>
               <a:ext uri="{FF2B5EF4-FFF2-40B4-BE49-F238E27FC236}">
-                <a16:creationId xmlns:a16="http://schemas.microsoft.com/office/drawing/2014/main" id="{25EC705E-33F7-EED1-988B-87BA207EE953}"/>
+                <a16:creationId xmlns:a16="http://schemas.microsoft.com/office/drawing/2014/main" id="{FA01DCA8-2B91-9CA1-3DD9-BE9D4A2BF642}"/>
               </a:ext>
             </a:extLst>
           </p:cNvPr>
@@ -2425,7 +2425,7 @@
           <p:cNvPr id="3" name="コンテンツ プレースホルダー 2">
             <a:extLst>
               <a:ext uri="{FF2B5EF4-FFF2-40B4-BE49-F238E27FC236}">
-                <a16:creationId xmlns:a16="http://schemas.microsoft.com/office/drawing/2014/main" id="{4EF5E68D-2AAF-0A74-3F97-94969A5C8348}"/>
+                <a16:creationId xmlns:a16="http://schemas.microsoft.com/office/drawing/2014/main" id="{3B5D8648-1ACC-8FF8-897D-9A9CE2DFA53A}"/>
               </a:ext>
             </a:extLst>
           </p:cNvPr>
@@ -2547,7 +2547,7 @@
           <p:cNvPr id="4" name="テキスト プレースホルダー 3">
             <a:extLst>
               <a:ext uri="{FF2B5EF4-FFF2-40B4-BE49-F238E27FC236}">
-                <a16:creationId xmlns:a16="http://schemas.microsoft.com/office/drawing/2014/main" id="{B2056D21-8FE5-5CC9-0BE9-747C81B84242}"/>
+                <a16:creationId xmlns:a16="http://schemas.microsoft.com/office/drawing/2014/main" id="{15C148E9-8114-CF06-620A-71B86CB3AFB4}"/>
               </a:ext>
             </a:extLst>
           </p:cNvPr>
@@ -2618,7 +2618,7 @@
           <p:cNvPr id="5" name="日付プレースホルダー 4">
             <a:extLst>
               <a:ext uri="{FF2B5EF4-FFF2-40B4-BE49-F238E27FC236}">
-                <a16:creationId xmlns:a16="http://schemas.microsoft.com/office/drawing/2014/main" id="{70A57D6D-05E3-3D73-4B85-C1B5959F1FAE}"/>
+                <a16:creationId xmlns:a16="http://schemas.microsoft.com/office/drawing/2014/main" id="{C40816E5-51C7-E581-7170-30901284470E}"/>
               </a:ext>
             </a:extLst>
           </p:cNvPr>
@@ -2634,7 +2634,7 @@
           <a:bodyPr/>
           <a:lstStyle/>
           <a:p>
-            <a:fld id="{BA6581C9-D067-4B56-B33F-6FAD14E4725A}" type="datetimeFigureOut">
+            <a:fld id="{DD205A3B-50EA-4C37-80B4-D1B842B0092D}" type="datetimeFigureOut">
               <a:rPr kumimoji="1" lang="ja-JP" altLang="en-US" smtClean="0"/>
               <a:t>2026/7/30</a:t>
             </a:fld>
@@ -2647,7 +2647,7 @@
           <p:cNvPr id="6" name="フッター プレースホルダー 5">
             <a:extLst>
               <a:ext uri="{FF2B5EF4-FFF2-40B4-BE49-F238E27FC236}">
-                <a16:creationId xmlns:a16="http://schemas.microsoft.com/office/drawing/2014/main" id="{D678F1F6-D635-57B1-5C2C-437EC1F43010}"/>
+                <a16:creationId xmlns:a16="http://schemas.microsoft.com/office/drawing/2014/main" id="{F5178868-F4C7-451B-F04B-4A4CC57F29FD}"/>
               </a:ext>
             </a:extLst>
           </p:cNvPr>
@@ -2672,7 +2672,7 @@
           <p:cNvPr id="7" name="スライド番号プレースホルダー 6">
             <a:extLst>
               <a:ext uri="{FF2B5EF4-FFF2-40B4-BE49-F238E27FC236}">
-                <a16:creationId xmlns:a16="http://schemas.microsoft.com/office/drawing/2014/main" id="{98CAFA6E-B93C-BECF-9387-EEC75045E8EF}"/>
+                <a16:creationId xmlns:a16="http://schemas.microsoft.com/office/drawing/2014/main" id="{4EE55B9D-53AB-9CE6-197E-B6F30CC4D2C0}"/>
               </a:ext>
             </a:extLst>
           </p:cNvPr>
@@ -2688,7 +2688,7 @@
           <a:bodyPr/>
           <a:lstStyle/>
           <a:p>
-            <a:fld id="{0C317195-F16F-4F0F-8BB5-ADA0647B62BC}" type="slidenum">
+            <a:fld id="{6783D587-5AC6-4249-AFF1-42233633B41A}" type="slidenum">
               <a:rPr kumimoji="1" lang="ja-JP" altLang="en-US" smtClean="0"/>
               <a:t>‹#›</a:t>
             </a:fld>
@@ -2699,7 +2699,7 @@
     </p:spTree>
     <p:extLst>
       <p:ext uri="{BB962C8B-B14F-4D97-AF65-F5344CB8AC3E}">
-        <p14:creationId xmlns:p14="http://schemas.microsoft.com/office/powerpoint/2010/main" val="2015523416"/>
+        <p14:creationId xmlns:p14="http://schemas.microsoft.com/office/powerpoint/2010/main" val="1465047694"/>
       </p:ext>
     </p:extLst>
   </p:cSld>
@@ -2731,7 +2731,7 @@
           <p:cNvPr id="2" name="タイトル 1">
             <a:extLst>
               <a:ext uri="{FF2B5EF4-FFF2-40B4-BE49-F238E27FC236}">
-                <a16:creationId xmlns:a16="http://schemas.microsoft.com/office/drawing/2014/main" id="{39F09D7D-03EE-B6C8-4551-FDA179739CDF}"/>
+                <a16:creationId xmlns:a16="http://schemas.microsoft.com/office/drawing/2014/main" id="{46857597-25D6-A91B-2F86-78B6C24B626B}"/>
               </a:ext>
             </a:extLst>
           </p:cNvPr>
@@ -2768,7 +2768,7 @@
           <p:cNvPr id="3" name="図プレースホルダー 2">
             <a:extLst>
               <a:ext uri="{FF2B5EF4-FFF2-40B4-BE49-F238E27FC236}">
-                <a16:creationId xmlns:a16="http://schemas.microsoft.com/office/drawing/2014/main" id="{DED479C2-8FFF-6544-916A-40AE8E401637}"/>
+                <a16:creationId xmlns:a16="http://schemas.microsoft.com/office/drawing/2014/main" id="{536B4365-42E1-A50B-3F53-AACFB711D699}"/>
               </a:ext>
             </a:extLst>
           </p:cNvPr>
@@ -2835,7 +2835,7 @@
           <p:cNvPr id="4" name="テキスト プレースホルダー 3">
             <a:extLst>
               <a:ext uri="{FF2B5EF4-FFF2-40B4-BE49-F238E27FC236}">
-                <a16:creationId xmlns:a16="http://schemas.microsoft.com/office/drawing/2014/main" id="{ECC65143-6FF7-4109-98D6-55AD02E04C75}"/>
+                <a16:creationId xmlns:a16="http://schemas.microsoft.com/office/drawing/2014/main" id="{F8AC5578-CA8D-2270-EE8A-43736CD119DD}"/>
               </a:ext>
             </a:extLst>
           </p:cNvPr>
@@ -2906,7 +2906,7 @@
           <p:cNvPr id="5" name="日付プレースホルダー 4">
             <a:extLst>
               <a:ext uri="{FF2B5EF4-FFF2-40B4-BE49-F238E27FC236}">
-                <a16:creationId xmlns:a16="http://schemas.microsoft.com/office/drawing/2014/main" id="{8C65375E-C8C6-5FB5-0798-6EA03BACD602}"/>
+                <a16:creationId xmlns:a16="http://schemas.microsoft.com/office/drawing/2014/main" id="{811911A7-6AF8-2676-AA53-10FAB2F76154}"/>
               </a:ext>
             </a:extLst>
           </p:cNvPr>
@@ -2922,7 +2922,7 @@
           <a:bodyPr/>
           <a:lstStyle/>
           <a:p>
-            <a:fld id="{BA6581C9-D067-4B56-B33F-6FAD14E4725A}" type="datetimeFigureOut">
+            <a:fld id="{DD205A3B-50EA-4C37-80B4-D1B842B0092D}" type="datetimeFigureOut">
               <a:rPr kumimoji="1" lang="ja-JP" altLang="en-US" smtClean="0"/>
               <a:t>2026/7/30</a:t>
             </a:fld>
@@ -2935,7 +2935,7 @@
           <p:cNvPr id="6" name="フッター プレースホルダー 5">
             <a:extLst>
               <a:ext uri="{FF2B5EF4-FFF2-40B4-BE49-F238E27FC236}">
-                <a16:creationId xmlns:a16="http://schemas.microsoft.com/office/drawing/2014/main" id="{62AD49A7-EFDF-E17C-068A-CF0909099C22}"/>
+                <a16:creationId xmlns:a16="http://schemas.microsoft.com/office/drawing/2014/main" id="{5C368DCE-5E44-5FD8-D461-452D4E24A5B6}"/>
               </a:ext>
             </a:extLst>
           </p:cNvPr>
@@ -2960,7 +2960,7 @@
           <p:cNvPr id="7" name="スライド番号プレースホルダー 6">
             <a:extLst>
               <a:ext uri="{FF2B5EF4-FFF2-40B4-BE49-F238E27FC236}">
-                <a16:creationId xmlns:a16="http://schemas.microsoft.com/office/drawing/2014/main" id="{494393AE-EACC-C8A3-C091-1C4D8258FD47}"/>
+                <a16:creationId xmlns:a16="http://schemas.microsoft.com/office/drawing/2014/main" id="{44B03B24-4876-C959-8CA1-119F69936297}"/>
               </a:ext>
             </a:extLst>
           </p:cNvPr>
@@ -2976,7 +2976,7 @@
           <a:bodyPr/>
           <a:lstStyle/>
           <a:p>
-            <a:fld id="{0C317195-F16F-4F0F-8BB5-ADA0647B62BC}" type="slidenum">
+            <a:fld id="{6783D587-5AC6-4249-AFF1-42233633B41A}" type="slidenum">
               <a:rPr kumimoji="1" lang="ja-JP" altLang="en-US" smtClean="0"/>
               <a:t>‹#›</a:t>
             </a:fld>
@@ -2987,7 +2987,7 @@
     </p:spTree>
     <p:extLst>
       <p:ext uri="{BB962C8B-B14F-4D97-AF65-F5344CB8AC3E}">
-        <p14:creationId xmlns:p14="http://schemas.microsoft.com/office/powerpoint/2010/main" val="101263537"/>
+        <p14:creationId xmlns:p14="http://schemas.microsoft.com/office/powerpoint/2010/main" val="2035130259"/>
       </p:ext>
     </p:extLst>
   </p:cSld>
@@ -3024,7 +3024,7 @@
           <p:cNvPr id="2" name="タイトル プレースホルダー 1">
             <a:extLst>
               <a:ext uri="{FF2B5EF4-FFF2-40B4-BE49-F238E27FC236}">
-                <a16:creationId xmlns:a16="http://schemas.microsoft.com/office/drawing/2014/main" id="{C6C55061-77A5-12CD-E82C-AC65707A6E7B}"/>
+                <a16:creationId xmlns:a16="http://schemas.microsoft.com/office/drawing/2014/main" id="{9FE4BDCA-9A37-3892-88D3-9EF04574F0FE}"/>
               </a:ext>
             </a:extLst>
           </p:cNvPr>
@@ -3062,7 +3062,7 @@
           <p:cNvPr id="3" name="テキスト プレースホルダー 2">
             <a:extLst>
               <a:ext uri="{FF2B5EF4-FFF2-40B4-BE49-F238E27FC236}">
-                <a16:creationId xmlns:a16="http://schemas.microsoft.com/office/drawing/2014/main" id="{C93594E2-59BA-6009-2BD6-0419B5549A7D}"/>
+                <a16:creationId xmlns:a16="http://schemas.microsoft.com/office/drawing/2014/main" id="{8895A6E8-613F-F9B8-DA2A-2C2D6838B934}"/>
               </a:ext>
             </a:extLst>
           </p:cNvPr>
@@ -3161,7 +3161,7 @@
           <p:cNvPr id="4" name="日付プレースホルダー 3">
             <a:extLst>
               <a:ext uri="{FF2B5EF4-FFF2-40B4-BE49-F238E27FC236}">
-                <a16:creationId xmlns:a16="http://schemas.microsoft.com/office/drawing/2014/main" id="{9B4D6629-1A40-6431-8C6C-28758064E407}"/>
+                <a16:creationId xmlns:a16="http://schemas.microsoft.com/office/drawing/2014/main" id="{86C6A4C4-D517-387C-B2A3-6B1D0036C9DD}"/>
               </a:ext>
             </a:extLst>
           </p:cNvPr>
@@ -3195,7 +3195,7 @@
             </a:lvl1pPr>
           </a:lstStyle>
           <a:p>
-            <a:fld id="{BA6581C9-D067-4B56-B33F-6FAD14E4725A}" type="datetimeFigureOut">
+            <a:fld id="{DD205A3B-50EA-4C37-80B4-D1B842B0092D}" type="datetimeFigureOut">
               <a:rPr kumimoji="1" lang="ja-JP" altLang="en-US" smtClean="0"/>
               <a:t>2026/7/30</a:t>
             </a:fld>
@@ -3208,7 +3208,7 @@
           <p:cNvPr id="5" name="フッター プレースホルダー 4">
             <a:extLst>
               <a:ext uri="{FF2B5EF4-FFF2-40B4-BE49-F238E27FC236}">
-                <a16:creationId xmlns:a16="http://schemas.microsoft.com/office/drawing/2014/main" id="{3DF34EF8-D5CF-C473-7728-004205434D5B}"/>
+                <a16:creationId xmlns:a16="http://schemas.microsoft.com/office/drawing/2014/main" id="{E40246FD-35FB-9C3C-12A4-1599312B6768}"/>
               </a:ext>
             </a:extLst>
           </p:cNvPr>
@@ -3251,7 +3251,7 @@
           <p:cNvPr id="6" name="スライド番号プレースホルダー 5">
             <a:extLst>
               <a:ext uri="{FF2B5EF4-FFF2-40B4-BE49-F238E27FC236}">
-                <a16:creationId xmlns:a16="http://schemas.microsoft.com/office/drawing/2014/main" id="{B85C635F-21BF-0C15-E928-D23DAC5AA275}"/>
+                <a16:creationId xmlns:a16="http://schemas.microsoft.com/office/drawing/2014/main" id="{3EB4C28D-0BBF-4CA4-B60E-5C70541AE217}"/>
               </a:ext>
             </a:extLst>
           </p:cNvPr>
@@ -3285,7 +3285,7 @@
             </a:lvl1pPr>
           </a:lstStyle>
           <a:p>
-            <a:fld id="{0C317195-F16F-4F0F-8BB5-ADA0647B62BC}" type="slidenum">
+            <a:fld id="{6783D587-5AC6-4249-AFF1-42233633B41A}" type="slidenum">
               <a:rPr kumimoji="1" lang="ja-JP" altLang="en-US" smtClean="0"/>
               <a:t>‹#›</a:t>
             </a:fld>
@@ -3296,7 +3296,7 @@
     </p:spTree>
     <p:extLst>
       <p:ext uri="{BB962C8B-B14F-4D97-AF65-F5344CB8AC3E}">
-        <p14:creationId xmlns:p14="http://schemas.microsoft.com/office/powerpoint/2010/main" val="38544028"/>
+        <p14:creationId xmlns:p14="http://schemas.microsoft.com/office/powerpoint/2010/main" val="3928463370"/>
       </p:ext>
     </p:extLst>
   </p:cSld>
@@ -3619,7 +3619,7 @@
           <p:cNvPr id="2" name="テキスト ボックス 1">
             <a:extLst>
               <a:ext uri="{FF2B5EF4-FFF2-40B4-BE49-F238E27FC236}">
-                <a16:creationId xmlns:a16="http://schemas.microsoft.com/office/drawing/2014/main" id="{DE5F33E0-FA43-BE8D-FCCE-BCCE084FAF32}"/>
+                <a16:creationId xmlns:a16="http://schemas.microsoft.com/office/drawing/2014/main" id="{10A212C0-75CB-0186-4CAE-98A849DF08C1}"/>
               </a:ext>
             </a:extLst>
           </p:cNvPr>
@@ -3665,7 +3665,7 @@
           <p:cNvPr id="3" name="テキスト ボックス 2">
             <a:extLst>
               <a:ext uri="{FF2B5EF4-FFF2-40B4-BE49-F238E27FC236}">
-                <a16:creationId xmlns:a16="http://schemas.microsoft.com/office/drawing/2014/main" id="{CA674E7F-E5DB-20AA-BF63-9383F013381F}"/>
+                <a16:creationId xmlns:a16="http://schemas.microsoft.com/office/drawing/2014/main" id="{CA6D9186-0D08-F57B-BBBB-181330580CD9}"/>
               </a:ext>
             </a:extLst>
           </p:cNvPr>
@@ -3714,7 +3714,7 @@
           <p:cNvPr id="4" name="テキスト ボックス 3">
             <a:extLst>
               <a:ext uri="{FF2B5EF4-FFF2-40B4-BE49-F238E27FC236}">
-                <a16:creationId xmlns:a16="http://schemas.microsoft.com/office/drawing/2014/main" id="{1953C787-EFE5-EB08-8F45-A4E0346EB8AF}"/>
+                <a16:creationId xmlns:a16="http://schemas.microsoft.com/office/drawing/2014/main" id="{629F2405-8FE0-31E7-D141-AC7B092E14CF}"/>
               </a:ext>
             </a:extLst>
           </p:cNvPr>
@@ -3754,7 +3754,7 @@
           <p:cNvPr id="5" name="テキスト ボックス 4">
             <a:extLst>
               <a:ext uri="{FF2B5EF4-FFF2-40B4-BE49-F238E27FC236}">
-                <a16:creationId xmlns:a16="http://schemas.microsoft.com/office/drawing/2014/main" id="{93EC25E8-F62C-C582-F5B5-B5298984D1EB}"/>
+                <a16:creationId xmlns:a16="http://schemas.microsoft.com/office/drawing/2014/main" id="{B9105B85-ECB8-4A90-B946-D4331688A21C}"/>
               </a:ext>
             </a:extLst>
           </p:cNvPr>
@@ -3801,7 +3801,7 @@
             <a:hlinkClick r:id="" action="ppaction://media"/>
             <a:extLst>
               <a:ext uri="{FF2B5EF4-FFF2-40B4-BE49-F238E27FC236}">
-                <a16:creationId xmlns:a16="http://schemas.microsoft.com/office/drawing/2014/main" id="{C0F0DE84-B979-9A86-ECAD-6FAD015E2325}"/>
+                <a16:creationId xmlns:a16="http://schemas.microsoft.com/office/drawing/2014/main" id="{96F38F82-02F8-BABA-4367-B12BC8CAC772}"/>
               </a:ext>
             </a:extLst>
           </p:cNvPr>
@@ -3836,7 +3836,7 @@
     </p:spTree>
     <p:extLst>
       <p:ext uri="{BB962C8B-B14F-4D97-AF65-F5344CB8AC3E}">
-        <p14:creationId xmlns:p14="http://schemas.microsoft.com/office/powerpoint/2010/main" val="2715387489"/>
+        <p14:creationId xmlns:p14="http://schemas.microsoft.com/office/powerpoint/2010/main" val="1315600347"/>
       </p:ext>
     </p:extLst>
   </p:cSld>
@@ -3960,7 +3960,7 @@
           <p:cNvPr id="2" name="テキスト ボックス 1">
             <a:extLst>
               <a:ext uri="{FF2B5EF4-FFF2-40B4-BE49-F238E27FC236}">
-                <a16:creationId xmlns:a16="http://schemas.microsoft.com/office/drawing/2014/main" id="{16BBD0A1-927A-EAB8-34E6-8EC6D275064E}"/>
+                <a16:creationId xmlns:a16="http://schemas.microsoft.com/office/drawing/2014/main" id="{463D59AA-3903-E4E6-3032-E6A92712CAF6}"/>
               </a:ext>
             </a:extLst>
           </p:cNvPr>
@@ -4006,7 +4006,7 @@
           <p:cNvPr id="3" name="テキスト ボックス 2">
             <a:extLst>
               <a:ext uri="{FF2B5EF4-FFF2-40B4-BE49-F238E27FC236}">
-                <a16:creationId xmlns:a16="http://schemas.microsoft.com/office/drawing/2014/main" id="{EEE81148-4C05-6B8F-354D-F3E0FEA77E4D}"/>
+                <a16:creationId xmlns:a16="http://schemas.microsoft.com/office/drawing/2014/main" id="{80BAFAB6-EE6E-6C21-7AB7-CB2D28AB4298}"/>
               </a:ext>
             </a:extLst>
           </p:cNvPr>
@@ -4046,7 +4046,7 @@
           <p:cNvPr id="4" name="テキスト ボックス 3">
             <a:extLst>
               <a:ext uri="{FF2B5EF4-FFF2-40B4-BE49-F238E27FC236}">
-                <a16:creationId xmlns:a16="http://schemas.microsoft.com/office/drawing/2014/main" id="{BEE881CC-C70A-ED29-CDEC-53CE64A0250E}"/>
+                <a16:creationId xmlns:a16="http://schemas.microsoft.com/office/drawing/2014/main" id="{F273BC22-D6AA-53ED-1686-6487CD2AEC67}"/>
               </a:ext>
             </a:extLst>
           </p:cNvPr>
@@ -4113,7 +4113,7 @@
           <p:cNvPr id="5" name="テキスト ボックス 4">
             <a:extLst>
               <a:ext uri="{FF2B5EF4-FFF2-40B4-BE49-F238E27FC236}">
-                <a16:creationId xmlns:a16="http://schemas.microsoft.com/office/drawing/2014/main" id="{C2A4DB90-90CE-5D17-22FC-490A44CCD71C}"/>
+                <a16:creationId xmlns:a16="http://schemas.microsoft.com/office/drawing/2014/main" id="{0DCFF0CC-BADA-037C-CC7D-DB9339D62F68}"/>
               </a:ext>
             </a:extLst>
           </p:cNvPr>
@@ -4160,7 +4160,7 @@
             <a:hlinkClick r:id="" action="ppaction://media"/>
             <a:extLst>
               <a:ext uri="{FF2B5EF4-FFF2-40B4-BE49-F238E27FC236}">
-                <a16:creationId xmlns:a16="http://schemas.microsoft.com/office/drawing/2014/main" id="{B0C37B32-AE23-14AA-0565-2A154EC2A922}"/>
+                <a16:creationId xmlns:a16="http://schemas.microsoft.com/office/drawing/2014/main" id="{1267D33E-7829-C8BA-4AE8-2152C067D5F3}"/>
               </a:ext>
             </a:extLst>
           </p:cNvPr>
@@ -4195,7 +4195,7 @@
     </p:spTree>
     <p:extLst>
       <p:ext uri="{BB962C8B-B14F-4D97-AF65-F5344CB8AC3E}">
-        <p14:creationId xmlns:p14="http://schemas.microsoft.com/office/powerpoint/2010/main" val="685803449"/>
+        <p14:creationId xmlns:p14="http://schemas.microsoft.com/office/powerpoint/2010/main" val="1005053687"/>
       </p:ext>
     </p:extLst>
   </p:cSld>
@@ -4319,7 +4319,7 @@
           <p:cNvPr id="2" name="テキスト ボックス 1">
             <a:extLst>
               <a:ext uri="{FF2B5EF4-FFF2-40B4-BE49-F238E27FC236}">
-                <a16:creationId xmlns:a16="http://schemas.microsoft.com/office/drawing/2014/main" id="{67179D2E-ECB2-A736-E1B1-69693ACEDCE4}"/>
+                <a16:creationId xmlns:a16="http://schemas.microsoft.com/office/drawing/2014/main" id="{517D1727-D976-6C52-7811-34013FFC3649}"/>
               </a:ext>
             </a:extLst>
           </p:cNvPr>
@@ -4365,7 +4365,7 @@
           <p:cNvPr id="3" name="テキスト ボックス 2">
             <a:extLst>
               <a:ext uri="{FF2B5EF4-FFF2-40B4-BE49-F238E27FC236}">
-                <a16:creationId xmlns:a16="http://schemas.microsoft.com/office/drawing/2014/main" id="{462E54E6-B5B2-3721-08EC-B01F90FDF769}"/>
+                <a16:creationId xmlns:a16="http://schemas.microsoft.com/office/drawing/2014/main" id="{D13DB6AF-E55D-9CCC-8709-7E63596490A2}"/>
               </a:ext>
             </a:extLst>
           </p:cNvPr>
@@ -4405,7 +4405,7 @@
           <p:cNvPr id="4" name="テキスト ボックス 3">
             <a:extLst>
               <a:ext uri="{FF2B5EF4-FFF2-40B4-BE49-F238E27FC236}">
-                <a16:creationId xmlns:a16="http://schemas.microsoft.com/office/drawing/2014/main" id="{E105DEF4-0904-A128-AF99-338EFD6F0EC0}"/>
+                <a16:creationId xmlns:a16="http://schemas.microsoft.com/office/drawing/2014/main" id="{9231417A-AB71-6C0A-18D2-BC94FEA87283}"/>
               </a:ext>
             </a:extLst>
           </p:cNvPr>
@@ -4500,7 +4500,7 @@
           <p:cNvPr id="5" name="テキスト ボックス 4">
             <a:extLst>
               <a:ext uri="{FF2B5EF4-FFF2-40B4-BE49-F238E27FC236}">
-                <a16:creationId xmlns:a16="http://schemas.microsoft.com/office/drawing/2014/main" id="{484F4AD8-BEF3-44A3-3F53-1A6555F9F61F}"/>
+                <a16:creationId xmlns:a16="http://schemas.microsoft.com/office/drawing/2014/main" id="{5007A1E1-7D02-8019-F109-8D38EFD82466}"/>
               </a:ext>
             </a:extLst>
           </p:cNvPr>
@@ -4547,7 +4547,7 @@
             <a:hlinkClick r:id="" action="ppaction://media"/>
             <a:extLst>
               <a:ext uri="{FF2B5EF4-FFF2-40B4-BE49-F238E27FC236}">
-                <a16:creationId xmlns:a16="http://schemas.microsoft.com/office/drawing/2014/main" id="{415D540E-B2EC-283F-63CD-DDD6AA04E5C2}"/>
+                <a16:creationId xmlns:a16="http://schemas.microsoft.com/office/drawing/2014/main" id="{7E83030B-7F30-77F0-A3D8-62D5C682D552}"/>
               </a:ext>
             </a:extLst>
           </p:cNvPr>
@@ -4582,7 +4582,7 @@
     </p:spTree>
     <p:extLst>
       <p:ext uri="{BB962C8B-B14F-4D97-AF65-F5344CB8AC3E}">
-        <p14:creationId xmlns:p14="http://schemas.microsoft.com/office/powerpoint/2010/main" val="2319079920"/>
+        <p14:creationId xmlns:p14="http://schemas.microsoft.com/office/powerpoint/2010/main" val="3712268747"/>
       </p:ext>
     </p:extLst>
   </p:cSld>
@@ -4706,7 +4706,7 @@
           <p:cNvPr id="2" name="テキスト ボックス 1">
             <a:extLst>
               <a:ext uri="{FF2B5EF4-FFF2-40B4-BE49-F238E27FC236}">
-                <a16:creationId xmlns:a16="http://schemas.microsoft.com/office/drawing/2014/main" id="{28A987D2-6E82-081E-98C8-DEA377CB2071}"/>
+                <a16:creationId xmlns:a16="http://schemas.microsoft.com/office/drawing/2014/main" id="{550CA996-8588-7ABB-1E0C-1C482772949C}"/>
               </a:ext>
             </a:extLst>
           </p:cNvPr>
@@ -4752,7 +4752,7 @@
           <p:cNvPr id="3" name="テキスト ボックス 2">
             <a:extLst>
               <a:ext uri="{FF2B5EF4-FFF2-40B4-BE49-F238E27FC236}">
-                <a16:creationId xmlns:a16="http://schemas.microsoft.com/office/drawing/2014/main" id="{313BEB35-CEF5-B65F-8179-132F81A0F137}"/>
+                <a16:creationId xmlns:a16="http://schemas.microsoft.com/office/drawing/2014/main" id="{408E252A-E2FE-23E1-8E64-C14EA526A3D9}"/>
               </a:ext>
             </a:extLst>
           </p:cNvPr>
@@ -4792,7 +4792,7 @@
           <p:cNvPr id="4" name="テキスト ボックス 3">
             <a:extLst>
               <a:ext uri="{FF2B5EF4-FFF2-40B4-BE49-F238E27FC236}">
-                <a16:creationId xmlns:a16="http://schemas.microsoft.com/office/drawing/2014/main" id="{DFC2425A-5B4A-45DD-5ED0-DC754AA3A036}"/>
+                <a16:creationId xmlns:a16="http://schemas.microsoft.com/office/drawing/2014/main" id="{CCE649F5-98AF-DA65-F928-C6F96806AA6D}"/>
               </a:ext>
             </a:extLst>
           </p:cNvPr>
@@ -4902,7 +4902,7 @@
           <p:cNvPr id="5" name="テキスト ボックス 4">
             <a:extLst>
               <a:ext uri="{FF2B5EF4-FFF2-40B4-BE49-F238E27FC236}">
-                <a16:creationId xmlns:a16="http://schemas.microsoft.com/office/drawing/2014/main" id="{8991F83D-003A-6892-89F5-87AE07019872}"/>
+                <a16:creationId xmlns:a16="http://schemas.microsoft.com/office/drawing/2014/main" id="{B466E2B6-9082-B5E4-DBD4-0437453CA5E7}"/>
               </a:ext>
             </a:extLst>
           </p:cNvPr>
@@ -4949,7 +4949,7 @@
             <a:hlinkClick r:id="" action="ppaction://media"/>
             <a:extLst>
               <a:ext uri="{FF2B5EF4-FFF2-40B4-BE49-F238E27FC236}">
-                <a16:creationId xmlns:a16="http://schemas.microsoft.com/office/drawing/2014/main" id="{BB2F3125-B77B-725B-E5AD-1C065DAC7522}"/>
+                <a16:creationId xmlns:a16="http://schemas.microsoft.com/office/drawing/2014/main" id="{AC23781C-5C40-38F4-F969-A514EE0AE171}"/>
               </a:ext>
             </a:extLst>
           </p:cNvPr>
@@ -4984,7 +4984,7 @@
     </p:spTree>
     <p:extLst>
       <p:ext uri="{BB962C8B-B14F-4D97-AF65-F5344CB8AC3E}">
-        <p14:creationId xmlns:p14="http://schemas.microsoft.com/office/powerpoint/2010/main" val="3329424586"/>
+        <p14:creationId xmlns:p14="http://schemas.microsoft.com/office/powerpoint/2010/main" val="578266103"/>
       </p:ext>
     </p:extLst>
   </p:cSld>
@@ -5108,7 +5108,7 @@
           <p:cNvPr id="2" name="テキスト ボックス 1">
             <a:extLst>
               <a:ext uri="{FF2B5EF4-FFF2-40B4-BE49-F238E27FC236}">
-                <a16:creationId xmlns:a16="http://schemas.microsoft.com/office/drawing/2014/main" id="{1128C0CD-AD8A-F578-947E-07324AFD5FD4}"/>
+                <a16:creationId xmlns:a16="http://schemas.microsoft.com/office/drawing/2014/main" id="{30E5E5C2-AB45-83A2-7D6E-5711A2941220}"/>
               </a:ext>
             </a:extLst>
           </p:cNvPr>
@@ -5154,7 +5154,7 @@
           <p:cNvPr id="3" name="テキスト ボックス 2">
             <a:extLst>
               <a:ext uri="{FF2B5EF4-FFF2-40B4-BE49-F238E27FC236}">
-                <a16:creationId xmlns:a16="http://schemas.microsoft.com/office/drawing/2014/main" id="{CEDF5E3D-4A9A-AAE1-F6DD-39DA21419C31}"/>
+                <a16:creationId xmlns:a16="http://schemas.microsoft.com/office/drawing/2014/main" id="{6115B3B6-21D0-2F62-C336-2C22106AC5EF}"/>
               </a:ext>
             </a:extLst>
           </p:cNvPr>
@@ -5194,7 +5194,7 @@
           <p:cNvPr id="4" name="テキスト ボックス 3">
             <a:extLst>
               <a:ext uri="{FF2B5EF4-FFF2-40B4-BE49-F238E27FC236}">
-                <a16:creationId xmlns:a16="http://schemas.microsoft.com/office/drawing/2014/main" id="{0CF1A345-8D5D-EF57-8F15-0FDD6E374BE2}"/>
+                <a16:creationId xmlns:a16="http://schemas.microsoft.com/office/drawing/2014/main" id="{4F53FFF4-5055-44C1-E964-2B512C773E12}"/>
               </a:ext>
             </a:extLst>
           </p:cNvPr>
@@ -5218,20 +5218,14 @@
           <a:lstStyle/>
           <a:p>
             <a:r>
-              <a:rPr kumimoji="1" lang="en-US" altLang="ja-JP" sz="2000">
+              <a:rPr kumimoji="1" lang="ja-JP" altLang="en-US" sz="2000">
                 <a:solidFill>
                   <a:srgbClr val="333333"/>
                 </a:solidFill>
                 <a:latin typeface="Arial" panose="020B0604020202020204" pitchFamily="34" charset="0"/>
               </a:rPr>
-              <a:t>Set rankvote domain</a:t>
-            </a:r>
-            <a:endParaRPr kumimoji="1" lang="ja-JP" altLang="en-US" sz="2000">
-              <a:solidFill>
-                <a:srgbClr val="333333"/>
-              </a:solidFill>
-              <a:latin typeface="Arial" panose="020B0604020202020204" pitchFamily="34" charset="0"/>
-            </a:endParaRPr>
+              <a:t>直近のコミットでは、実装の見直しと継続的な改善が行われました。</a:t>
+            </a:r>
           </a:p>
         </p:txBody>
       </p:sp>
@@ -5240,7 +5234,7 @@
           <p:cNvPr id="5" name="テキスト ボックス 4">
             <a:extLst>
               <a:ext uri="{FF2B5EF4-FFF2-40B4-BE49-F238E27FC236}">
-                <a16:creationId xmlns:a16="http://schemas.microsoft.com/office/drawing/2014/main" id="{FCEF7334-BFF7-9A85-C952-1DDFF2F8A898}"/>
+                <a16:creationId xmlns:a16="http://schemas.microsoft.com/office/drawing/2014/main" id="{BBC868C4-F784-714D-BAB3-7D0E7692D022}"/>
               </a:ext>
             </a:extLst>
           </p:cNvPr>
@@ -5287,7 +5281,7 @@
             <a:hlinkClick r:id="" action="ppaction://media"/>
             <a:extLst>
               <a:ext uri="{FF2B5EF4-FFF2-40B4-BE49-F238E27FC236}">
-                <a16:creationId xmlns:a16="http://schemas.microsoft.com/office/drawing/2014/main" id="{9495F564-3C3A-6176-8DCF-AE533C787233}"/>
+                <a16:creationId xmlns:a16="http://schemas.microsoft.com/office/drawing/2014/main" id="{6CB0F032-D73E-2251-076C-DEED7C6DAC1C}"/>
               </a:ext>
             </a:extLst>
           </p:cNvPr>
@@ -5322,7 +5316,7 @@
     </p:spTree>
     <p:extLst>
       <p:ext uri="{BB962C8B-B14F-4D97-AF65-F5344CB8AC3E}">
-        <p14:creationId xmlns:p14="http://schemas.microsoft.com/office/powerpoint/2010/main" val="1528964694"/>
+        <p14:creationId xmlns:p14="http://schemas.microsoft.com/office/powerpoint/2010/main" val="568170250"/>
       </p:ext>
     </p:extLst>
   </p:cSld>
@@ -5331,10 +5325,10 @@
   </p:clrMapOvr>
   <mc:AlternateContent xmlns:mc="http://schemas.openxmlformats.org/markup-compatibility/2006">
     <mc:Choice xmlns:p14="http://schemas.microsoft.com/office/powerpoint/2010/main" Requires="p14">
-      <p:transition spd="slow" p14:dur="2000" advTm="6000"/>
+      <p:transition spd="slow" p14:dur="2000" advTm="7000"/>
     </mc:Choice>
     <mc:Fallback>
-      <p:transition spd="slow" advTm="6000"/>
+      <p:transition spd="slow" advTm="7000"/>
     </mc:Fallback>
   </mc:AlternateContent>
   <p:timing>
@@ -5365,7 +5359,7 @@
                                   <p:childTnLst>
                                     <p:cmd type="call" cmd="playFrom(0.0)">
                                       <p:cBhvr>
-                                        <p:cTn id="6" dur="5912" fill="hold"/>
+                                        <p:cTn id="6" dur="6076" fill="hold"/>
                                         <p:tgtEl>
                                           <p:spTgt spid="6"/>
                                         </p:tgtEl>
@@ -5446,7 +5440,7 @@
           <p:cNvPr id="2" name="テキスト ボックス 1">
             <a:extLst>
               <a:ext uri="{FF2B5EF4-FFF2-40B4-BE49-F238E27FC236}">
-                <a16:creationId xmlns:a16="http://schemas.microsoft.com/office/drawing/2014/main" id="{EC06F7C1-C188-56CE-F93D-AB358CE659F3}"/>
+                <a16:creationId xmlns:a16="http://schemas.microsoft.com/office/drawing/2014/main" id="{7F9F23C0-1D4D-66A4-0F99-677A686C1002}"/>
               </a:ext>
             </a:extLst>
           </p:cNvPr>
@@ -5492,7 +5486,7 @@
           <p:cNvPr id="3" name="テキスト ボックス 2">
             <a:extLst>
               <a:ext uri="{FF2B5EF4-FFF2-40B4-BE49-F238E27FC236}">
-                <a16:creationId xmlns:a16="http://schemas.microsoft.com/office/drawing/2014/main" id="{59E06A0C-5218-910D-1946-314D2365192D}"/>
+                <a16:creationId xmlns:a16="http://schemas.microsoft.com/office/drawing/2014/main" id="{21DF4A1E-3FE3-0A53-D42E-D33E27FE8504}"/>
               </a:ext>
             </a:extLst>
           </p:cNvPr>
@@ -5532,7 +5526,7 @@
           <p:cNvPr id="4" name="テキスト ボックス 3">
             <a:extLst>
               <a:ext uri="{FF2B5EF4-FFF2-40B4-BE49-F238E27FC236}">
-                <a16:creationId xmlns:a16="http://schemas.microsoft.com/office/drawing/2014/main" id="{1831333C-3B90-7CA6-06AC-AC454164760F}"/>
+                <a16:creationId xmlns:a16="http://schemas.microsoft.com/office/drawing/2014/main" id="{FD6FA7A9-AA4A-2229-CF93-877E53496C04}"/>
               </a:ext>
             </a:extLst>
           </p:cNvPr>
@@ -5597,7 +5591,7 @@
           <p:cNvPr id="5" name="テキスト ボックス 4">
             <a:extLst>
               <a:ext uri="{FF2B5EF4-FFF2-40B4-BE49-F238E27FC236}">
-                <a16:creationId xmlns:a16="http://schemas.microsoft.com/office/drawing/2014/main" id="{F79258C0-E1E8-3D31-51EC-8D607E5BFDCC}"/>
+                <a16:creationId xmlns:a16="http://schemas.microsoft.com/office/drawing/2014/main" id="{B939B2A2-4FE0-80A9-D1DD-7A2D461EE7FF}"/>
               </a:ext>
             </a:extLst>
           </p:cNvPr>
@@ -5644,7 +5638,7 @@
             <a:hlinkClick r:id="" action="ppaction://media"/>
             <a:extLst>
               <a:ext uri="{FF2B5EF4-FFF2-40B4-BE49-F238E27FC236}">
-                <a16:creationId xmlns:a16="http://schemas.microsoft.com/office/drawing/2014/main" id="{123B4D27-8413-D42D-33FE-40E241DC6E2C}"/>
+                <a16:creationId xmlns:a16="http://schemas.microsoft.com/office/drawing/2014/main" id="{A96DDF89-C76D-8BF3-FF84-0E79B06B37B9}"/>
               </a:ext>
             </a:extLst>
           </p:cNvPr>
@@ -5679,7 +5673,7 @@
     </p:spTree>
     <p:extLst>
       <p:ext uri="{BB962C8B-B14F-4D97-AF65-F5344CB8AC3E}">
-        <p14:creationId xmlns:p14="http://schemas.microsoft.com/office/powerpoint/2010/main" val="3416723078"/>
+        <p14:creationId xmlns:p14="http://schemas.microsoft.com/office/powerpoint/2010/main" val="3667338240"/>
       </p:ext>
     </p:extLst>
   </p:cSld>
